--- a/docs/presentations/registration_procurement_build.pptx
+++ b/docs/presentations/registration_procurement_build.pptx
@@ -116,27 +116,27 @@
   <p:extLst>
     <p:ext uri="{521415D9-36F7-43E2-AB2F-B90AF26B5E84}">
       <p14:sectionLst xmlns:p14="http://schemas.microsoft.com/office/powerpoint/2010/main">
-        <p14:section name="Introduction" id="{3331942e-c55d-27f2-1971-ad0437e71a19}">
+        <p14:section name="Introduction" id="{bf14626d-dd6f-a3d7-3c15-e6a4aa658351}">
           <p14:sldIdLst>
             <p14:sldId id="256"/>
             <p14:sldId id="257"/>
           </p14:sldIdLst>
         </p14:section>
-        <p14:section name="Scope of work" id="{e186e3c2-46b7-fd2f-f516-3fc57ce86b21}">
+        <p14:section name="Scope of work" id="{596617af-f6d9-5ba1-0115-234edc316cdd}">
           <p14:sldIdLst>
             <p14:sldId id="258"/>
             <p14:sldId id="259"/>
             <p14:sldId id="260"/>
           </p14:sldIdLst>
         </p14:section>
-        <p14:section name="Procurement" id="{0d594dd5-8ec8-f46a-da4e-eb7627f3c6cc}">
+        <p14:section name="Procurement" id="{4a66c495-c596-7e38-e37a-cae058354751}">
           <p14:sldIdLst>
             <p14:sldId id="261"/>
             <p14:sldId id="262"/>
             <p14:sldId id="263"/>
           </p14:sldIdLst>
         </p14:section>
-        <p14:section name="Mechanical build" id="{59540bb3-903b-059c-926a-14161e35255a}">
+        <p14:section name="Mechanical build" id="{53ff8779-e253-5ada-6cb5-e940059653fb}">
           <p14:sldIdLst>
             <p14:sldId id="264"/>
             <p14:sldId id="265"/>
@@ -1162,7 +1162,7 @@
           <a:p>
             <a:r>
               <a:rPr lang="en-US" dirty="0"/>
-              <a:t>This is appendix A of the procedure in brief, the stage-1 supplier list reduced to the items this procedure uses. MIC-6 tooling plate is sold with a stated flatness of about 0.13 mm, coarser than the 0.05 mm asked for, so the plate is ordered oversize and finish-ground by a local shop; float glass is flat enough as delivered and is the better choice where no grinding shop is at hand; a small granite surface plate works if its front is painted and the robot carries the weight. The instruments are stock items. The adapter is a one-off job for a machine shop, built to drawing SC1-05.</a:t>
+              <a:t>This is appendix A of the procedure in brief, the stage-1 supplier list reduced to the items this procedure uses. The plate is one of the two materials of the specification on the previous slide: MIC-6 tooling plate is sold with a stated flatness of about 0.13 mm, coarser than the 0.05 mm asked for, so it is ordered oversize and finish-ground by a local shop; float glass is flat enough as delivered and is the better choice where no grinding shop is at hand. In both cases the supplier's or grinding shop's flatness report is the starting document, and the 0.05 mm is confirmed in-house with the straightedge and feeler leaf after painting and after mounting, the state the sensor sees. The instruments are stock items. The adapter is a one-off job for a machine shop, built to drawing SC1-05.</a:t>
             </a:r>
             <a:endParaRPr lang="en-US" dirty="0"/>
           </a:p>
@@ -9241,7 +9241,7 @@
                             <a:schemeClr val="tx1"/>
                           </a:solidFill>
                         </a:rPr>
-                        <a:t>McMaster-Carr MIC-6 plus a grinding shop; Edmund Optics float glass; a small granite surface plate</a:t>
+                        <a:t>McMaster-Carr MIC-6 plus a grinding shop; Edmund Optics float glass</a:t>
                       </a:r>
                       <a:endParaRPr lang="en-US" sz="1400" dirty="0"/>
                     </a:p>
@@ -9302,7 +9302,7 @@
                             <a:schemeClr val="tx1"/>
                           </a:solidFill>
                         </a:rPr>
-                        <a:t>Painted matte after grinding; flatness checked after mounting</a:t>
+                        <a:t>Ground or glass to 0.05 mm with a flatness report; painted matte; re-checked in-house after painting and mounting</a:t>
                       </a:r>
                       <a:endParaRPr lang="en-US" sz="1400" dirty="0"/>
                     </a:p>

--- a/docs/presentations/registration_procurement_build.pptx
+++ b/docs/presentations/registration_procurement_build.pptx
@@ -116,27 +116,27 @@
   <p:extLst>
     <p:ext uri="{521415D9-36F7-43E2-AB2F-B90AF26B5E84}">
       <p14:sectionLst xmlns:p14="http://schemas.microsoft.com/office/powerpoint/2010/main">
-        <p14:section name="Introduction" id="{bf14626d-dd6f-a3d7-3c15-e6a4aa658351}">
+        <p14:section name="Introduction" id="{19c1be62-c1d5-59b0-918a-047569185b67}">
           <p14:sldIdLst>
             <p14:sldId id="256"/>
             <p14:sldId id="257"/>
           </p14:sldIdLst>
         </p14:section>
-        <p14:section name="Scope of work" id="{596617af-f6d9-5ba1-0115-234edc316cdd}">
+        <p14:section name="Scope of work" id="{e0a4f3b6-12b0-860a-278d-b1bbadd4801f}">
           <p14:sldIdLst>
             <p14:sldId id="258"/>
             <p14:sldId id="259"/>
             <p14:sldId id="260"/>
           </p14:sldIdLst>
         </p14:section>
-        <p14:section name="Procurement" id="{4a66c495-c596-7e38-e37a-cae058354751}">
+        <p14:section name="Procurement" id="{bd72de80-c9ee-2cf6-c1ff-c81026820a5b}">
           <p14:sldIdLst>
             <p14:sldId id="261"/>
             <p14:sldId id="262"/>
             <p14:sldId id="263"/>
           </p14:sldIdLst>
         </p14:section>
-        <p14:section name="Mechanical build" id="{53ff8779-e253-5ada-6cb5-e940059653fb}">
+        <p14:section name="Mechanical build" id="{399c4907-bb2e-c355-a4be-f35ce46c45c7}">
           <p14:sldIdLst>
             <p14:sldId id="264"/>
             <p14:sldId id="265"/>
@@ -634,7 +634,7 @@
           <a:p>
             <a:r>
               <a:rPr lang="en-US" dirty="0"/>
-              <a:t>These are the build and preparation checks of sections 1 and 3 of the procedure, gathered in one place. Each protects something the software cannot repair later: a board that is not flat gives plane residuals the registration reads as sensor error; a glossy spot returns a highlight and a bad read; a loose or unseated adapter shifts the board between poses and spoils every pose after it; wrong tool load data shifts every reported pose. The run-out and D measurements themselves are session steps, in deck 2.</a:t>
+              <a:t>These are the build and preparation checks of sections 1 and 3 of the procedure, gathered in one place. Each protects something the software cannot repair later: a board that is not flat gives plane residuals the registration reads as sensor error; a glossy spot returns a highlight and a bad read; a loose or unseated adapter shifts the board between poses and spoils every pose after it; wrong tool load data shifts every reported pose. The run-out and D measurements themselves are session steps, in deck 2. A remount is verified, not assumed: section 3 of the procedure repeats the run-out check and the D measurement and re-captures a saved reference pose, so that any change of the board's plane relative to the flange shows before it spoils a run.</a:t>
             </a:r>
             <a:endParaRPr lang="en-US" dirty="0"/>
           </a:p>
@@ -2785,7 +2785,7 @@
                   <a:schemeClr val="tx1"/>
                 </a:solidFill>
               </a:rPr>
-              <a:t>Dowels seated; the board goes back in the same place after a remount</a:t>
+              <a:t>Dowels seated; after any remount, the remount check of the procedure (run-out, D, reference capture) passes</a:t>
             </a:r>
             <a:endParaRPr lang="en-US" sz="1600" dirty="0"/>
           </a:p>

--- a/docs/presentations/registration_procurement_build.pptx
+++ b/docs/presentations/registration_procurement_build.pptx
@@ -116,27 +116,27 @@
   <p:extLst>
     <p:ext uri="{521415D9-36F7-43E2-AB2F-B90AF26B5E84}">
       <p14:sectionLst xmlns:p14="http://schemas.microsoft.com/office/powerpoint/2010/main">
-        <p14:section name="Introduction" id="{19c1be62-c1d5-59b0-918a-047569185b67}">
+        <p14:section name="Introduction" id="{f36f1498-5d5e-4ca2-6f26-908b60dd6903}">
           <p14:sldIdLst>
             <p14:sldId id="256"/>
             <p14:sldId id="257"/>
           </p14:sldIdLst>
         </p14:section>
-        <p14:section name="Scope of work" id="{e0a4f3b6-12b0-860a-278d-b1bbadd4801f}">
+        <p14:section name="Scope of work" id="{ba42456a-1508-c99b-e5bc-ee9be69b88e9}">
           <p14:sldIdLst>
             <p14:sldId id="258"/>
             <p14:sldId id="259"/>
             <p14:sldId id="260"/>
           </p14:sldIdLst>
         </p14:section>
-        <p14:section name="Procurement" id="{bd72de80-c9ee-2cf6-c1ff-c81026820a5b}">
+        <p14:section name="Procurement" id="{d13d2b87-00af-cdaf-ce1d-45abb8b0b4cb}">
           <p14:sldIdLst>
             <p14:sldId id="261"/>
             <p14:sldId id="262"/>
             <p14:sldId id="263"/>
           </p14:sldIdLst>
         </p14:section>
-        <p14:section name="Mechanical build" id="{399c4907-bb2e-c355-a4be-f35ce46c45c7}">
+        <p14:section name="Mechanical build" id="{d6d32b82-f0fb-4eea-6fc2-5579f1a8e02f}">
           <p14:sldIdLst>
             <p14:sldId id="264"/>
             <p14:sldId id="265"/>
@@ -898,7 +898,7 @@
           <a:p>
             <a:r>
               <a:rPr lang="en-US" dirty="0"/>
-              <a:t>These are the measuring tools and consumables of section 1c of the procedure. All of the tools were bought for stage 1; only consumables are new. The calipers measure the flange-to-face distance D and the board size that go in the pose log; the straightedge and a 0.05 mm feeler leaf check the board's flatness after painting and after mounting; the square sets the board's x axis when the tool frame is defined; the thermometer gives the room temperature for the session notes. No micrometers are needed, since there are no spheres to measure. The sensor, the robot, the capture computer with its communication software and the analysis computer are already in hand (section 1a).</a:t>
+              <a:t>These are the measuring tools and consumables of section 1c of the procedure. All of the tools were bought for stage 1; only consumables are new. The calipers measure the flange-to-face distance D, which sets the tool frame and goes in the session notes, and the board half-sizes, which go in the pose log; the straightedge and a 0.05 mm feeler leaf check the board's flatness after painting and after mounting; the square sets the board's x axis when the tool frame is defined; the thermometer gives the room temperature for the session notes. No micrometers are needed, since there are no spheres to measure. The sensor, the robot, the capture computer with its communication software and the analysis computer are already in hand (section 1a).</a:t>
             </a:r>
             <a:endParaRPr lang="en-US" dirty="0"/>
           </a:p>
@@ -1338,7 +1338,7 @@
           <a:p>
             <a:r>
               <a:rPr lang="en-US" dirty="0"/>
-              <a:t>The adapter is the one machined part. Its three lapped pads define the board plane, its three edge pins locate the board within that plane, and its three clamp fingers hold the board against the pads without bending it, so that a remount puts the board back in the same place. The plane of the pads must be parallel to the adapter's back face, which sits on the robot flange; that is what the run-out check verifies after mounting. Drawing SC1-05 in appendix D of the procedure gives every dimension and tolerance; the drawing is generated in the stage-1 repository and copied here. The figure is figure 1b of the procedure.</a:t>
+              <a:t>The adapter is the one part that needs a drawing. Its three lapped pads define the board plane, its three edge pins locate the board within that plane, and its three clamp fingers hold the board against the pads without bending it, so that a remount puts the board back in the same place. The plane of the pads must be parallel to the adapter's back face, which sits on the robot flange; that is what the run-out check verifies after mounting. Drawing SC1-05 in appendix D of the procedure gives every dimension and tolerance; the drawing is generated in the stage-1 repository and copied here. The figure is figure 1b of the procedure.</a:t>
             </a:r>
             <a:endParaRPr lang="en-US" dirty="0"/>
           </a:p>
@@ -3788,7 +3788,7 @@
                   </a:tcPr>
                 </a:tc>
               </a:tr>
-              <a:tr h="925830">
+              <a:tr h="1173480">
                 <a:tc>
                   <a:txBody>
                     <a:bodyPr/>
@@ -4034,7 +4034,7 @@
                   </a:tcPr>
                 </a:tc>
               </a:tr>
-              <a:tr h="925830">
+              <a:tr h="1173480">
                 <a:tc>
                   <a:txBody>
                     <a:bodyPr/>
@@ -4280,7 +4280,7 @@
                   </a:tcPr>
                 </a:tc>
               </a:tr>
-              <a:tr h="925830">
+              <a:tr h="1173480">
                 <a:tc>
                   <a:txBody>
                     <a:bodyPr/>
@@ -4526,252 +4526,6 @@
                   </a:tcPr>
                 </a:tc>
               </a:tr>
-              <a:tr h="925830">
-                <a:tc>
-                  <a:txBody>
-                    <a:bodyPr/>
-                    <a:lstStyle/>
-                    <a:p>
-                      <a:pPr algn="l" indent="0" marL="0">
-                        <a:buNone/>
-                      </a:pPr>
-                      <a:r>
-                        <a:rPr lang="en-US" sz="1400" dirty="0">
-                          <a:solidFill>
-                            <a:schemeClr val="tx1"/>
-                          </a:solidFill>
-                        </a:rPr>
-                        <a:t>Rigid sensor mount</a:t>
-                      </a:r>
-                      <a:endParaRPr lang="en-US" sz="1400" dirty="0"/>
-                    </a:p>
-                  </a:txBody>
-                  <a:tcPr marL="109728" marR="109728" marT="45720" marB="45720" anchor="ctr">
-                    <a:lnL w="6350" cap="flat" cmpd="sng" algn="ctr">
-                      <a:solidFill>
-                        <a:schemeClr val="accent6"/>
-                      </a:solidFill>
-                      <a:prstDash val="solid"/>
-                      <a:round/>
-                      <a:headEnd type="none" w="med" len="med"/>
-                      <a:tailEnd type="none" w="med" len="med"/>
-                    </a:lnL>
-                    <a:lnR w="6350" cap="flat" cmpd="sng" algn="ctr">
-                      <a:solidFill>
-                        <a:schemeClr val="accent6"/>
-                      </a:solidFill>
-                      <a:prstDash val="solid"/>
-                      <a:round/>
-                      <a:headEnd type="none" w="med" len="med"/>
-                      <a:tailEnd type="none" w="med" len="med"/>
-                    </a:lnR>
-                    <a:lnT w="6350" cap="flat" cmpd="sng" algn="ctr">
-                      <a:solidFill>
-                        <a:schemeClr val="accent6"/>
-                      </a:solidFill>
-                      <a:prstDash val="solid"/>
-                      <a:round/>
-                      <a:headEnd type="none" w="med" len="med"/>
-                      <a:tailEnd type="none" w="med" len="med"/>
-                    </a:lnT>
-                    <a:lnB w="6350" cap="flat" cmpd="sng" algn="ctr">
-                      <a:solidFill>
-                        <a:schemeClr val="accent6"/>
-                      </a:solidFill>
-                      <a:prstDash val="solid"/>
-                      <a:round/>
-                      <a:headEnd type="none" w="med" len="med"/>
-                      <a:tailEnd type="none" w="med" len="med"/>
-                    </a:lnB>
-                    <a:solidFill>
-                      <a:schemeClr val="bg2"/>
-                    </a:solidFill>
-                  </a:tcPr>
-                </a:tc>
-                <a:tc>
-                  <a:txBody>
-                    <a:bodyPr/>
-                    <a:lstStyle/>
-                    <a:p>
-                      <a:pPr algn="l" indent="0" marL="0">
-                        <a:buNone/>
-                      </a:pPr>
-                      <a:r>
-                        <a:rPr lang="en-US" sz="1400" dirty="0">
-                          <a:solidFill>
-                            <a:schemeClr val="tx1"/>
-                          </a:solidFill>
-                        </a:rPr>
-                        <a:t>1</a:t>
-                      </a:r>
-                      <a:endParaRPr lang="en-US" sz="1400" dirty="0"/>
-                    </a:p>
-                  </a:txBody>
-                  <a:tcPr marL="109728" marR="109728" marT="45720" marB="45720" anchor="ctr">
-                    <a:lnL w="6350" cap="flat" cmpd="sng" algn="ctr">
-                      <a:solidFill>
-                        <a:schemeClr val="accent6"/>
-                      </a:solidFill>
-                      <a:prstDash val="solid"/>
-                      <a:round/>
-                      <a:headEnd type="none" w="med" len="med"/>
-                      <a:tailEnd type="none" w="med" len="med"/>
-                    </a:lnL>
-                    <a:lnR w="6350" cap="flat" cmpd="sng" algn="ctr">
-                      <a:solidFill>
-                        <a:schemeClr val="accent6"/>
-                      </a:solidFill>
-                      <a:prstDash val="solid"/>
-                      <a:round/>
-                      <a:headEnd type="none" w="med" len="med"/>
-                      <a:tailEnd type="none" w="med" len="med"/>
-                    </a:lnR>
-                    <a:lnT w="6350" cap="flat" cmpd="sng" algn="ctr">
-                      <a:solidFill>
-                        <a:schemeClr val="accent6"/>
-                      </a:solidFill>
-                      <a:prstDash val="solid"/>
-                      <a:round/>
-                      <a:headEnd type="none" w="med" len="med"/>
-                      <a:tailEnd type="none" w="med" len="med"/>
-                    </a:lnT>
-                    <a:lnB w="6350" cap="flat" cmpd="sng" algn="ctr">
-                      <a:solidFill>
-                        <a:schemeClr val="accent6"/>
-                      </a:solidFill>
-                      <a:prstDash val="solid"/>
-                      <a:round/>
-                      <a:headEnd type="none" w="med" len="med"/>
-                      <a:tailEnd type="none" w="med" len="med"/>
-                    </a:lnB>
-                    <a:solidFill>
-                      <a:schemeClr val="bg2"/>
-                    </a:solidFill>
-                  </a:tcPr>
-                </a:tc>
-                <a:tc>
-                  <a:txBody>
-                    <a:bodyPr/>
-                    <a:lstStyle/>
-                    <a:p>
-                      <a:pPr algn="l" indent="0" marL="0">
-                        <a:buNone/>
-                      </a:pPr>
-                      <a:r>
-                        <a:rPr lang="en-US" sz="1400" dirty="0">
-                          <a:solidFill>
-                            <a:schemeClr val="tx1"/>
-                          </a:solidFill>
-                        </a:rPr>
-                        <a:t>existing drawing</a:t>
-                      </a:r>
-                      <a:endParaRPr lang="en-US" sz="1400" dirty="0"/>
-                    </a:p>
-                  </a:txBody>
-                  <a:tcPr marL="109728" marR="109728" marT="45720" marB="45720" anchor="ctr">
-                    <a:lnL w="6350" cap="flat" cmpd="sng" algn="ctr">
-                      <a:solidFill>
-                        <a:schemeClr val="accent6"/>
-                      </a:solidFill>
-                      <a:prstDash val="solid"/>
-                      <a:round/>
-                      <a:headEnd type="none" w="med" len="med"/>
-                      <a:tailEnd type="none" w="med" len="med"/>
-                    </a:lnL>
-                    <a:lnR w="6350" cap="flat" cmpd="sng" algn="ctr">
-                      <a:solidFill>
-                        <a:schemeClr val="accent6"/>
-                      </a:solidFill>
-                      <a:prstDash val="solid"/>
-                      <a:round/>
-                      <a:headEnd type="none" w="med" len="med"/>
-                      <a:tailEnd type="none" w="med" len="med"/>
-                    </a:lnR>
-                    <a:lnT w="6350" cap="flat" cmpd="sng" algn="ctr">
-                      <a:solidFill>
-                        <a:schemeClr val="accent6"/>
-                      </a:solidFill>
-                      <a:prstDash val="solid"/>
-                      <a:round/>
-                      <a:headEnd type="none" w="med" len="med"/>
-                      <a:tailEnd type="none" w="med" len="med"/>
-                    </a:lnT>
-                    <a:lnB w="6350" cap="flat" cmpd="sng" algn="ctr">
-                      <a:solidFill>
-                        <a:schemeClr val="accent6"/>
-                      </a:solidFill>
-                      <a:prstDash val="solid"/>
-                      <a:round/>
-                      <a:headEnd type="none" w="med" len="med"/>
-                      <a:tailEnd type="none" w="med" len="med"/>
-                    </a:lnB>
-                    <a:solidFill>
-                      <a:schemeClr val="bg2"/>
-                    </a:solidFill>
-                  </a:tcPr>
-                </a:tc>
-                <a:tc>
-                  <a:txBody>
-                    <a:bodyPr/>
-                    <a:lstStyle/>
-                    <a:p>
-                      <a:pPr algn="l" indent="0" marL="0">
-                        <a:buNone/>
-                      </a:pPr>
-                      <a:r>
-                        <a:rPr lang="en-US" sz="1400" dirty="0">
-                          <a:solidFill>
-                            <a:schemeClr val="tx1"/>
-                          </a:solidFill>
-                        </a:rPr>
-                        <a:t>yes</a:t>
-                      </a:r>
-                      <a:endParaRPr lang="en-US" sz="1400" dirty="0"/>
-                    </a:p>
-                  </a:txBody>
-                  <a:tcPr marL="109728" marR="109728" marT="45720" marB="45720" anchor="ctr">
-                    <a:lnL w="6350" cap="flat" cmpd="sng" algn="ctr">
-                      <a:solidFill>
-                        <a:schemeClr val="accent6"/>
-                      </a:solidFill>
-                      <a:prstDash val="solid"/>
-                      <a:round/>
-                      <a:headEnd type="none" w="med" len="med"/>
-                      <a:tailEnd type="none" w="med" len="med"/>
-                    </a:lnL>
-                    <a:lnR w="6350" cap="flat" cmpd="sng" algn="ctr">
-                      <a:solidFill>
-                        <a:schemeClr val="accent6"/>
-                      </a:solidFill>
-                      <a:prstDash val="solid"/>
-                      <a:round/>
-                      <a:headEnd type="none" w="med" len="med"/>
-                      <a:tailEnd type="none" w="med" len="med"/>
-                    </a:lnR>
-                    <a:lnT w="6350" cap="flat" cmpd="sng" algn="ctr">
-                      <a:solidFill>
-                        <a:schemeClr val="accent6"/>
-                      </a:solidFill>
-                      <a:prstDash val="solid"/>
-                      <a:round/>
-                      <a:headEnd type="none" w="med" len="med"/>
-                      <a:tailEnd type="none" w="med" len="med"/>
-                    </a:lnT>
-                    <a:lnB w="6350" cap="flat" cmpd="sng" algn="ctr">
-                      <a:solidFill>
-                        <a:schemeClr val="accent6"/>
-                      </a:solidFill>
-                      <a:prstDash val="solid"/>
-                      <a:round/>
-                      <a:headEnd type="none" w="med" len="med"/>
-                      <a:tailEnd type="none" w="med" len="med"/>
-                    </a:lnB>
-                    <a:solidFill>
-                      <a:schemeClr val="bg2"/>
-                    </a:solidFill>
-                  </a:tcPr>
-                </a:tc>
-              </a:tr>
             </a:tbl>
           </a:graphicData>
         </a:graphic>
@@ -4785,7 +4539,7 @@
         <p:spPr>
           <a:xfrm>
             <a:off x="9144000" y="1417320"/>
-            <a:ext cx="2590495" cy="4160520"/>
+            <a:ext cx="2590495" cy="3977640"/>
           </a:xfrm>
           <a:prstGeom prst="roundRect">
             <a:avLst>
@@ -4806,7 +4560,7 @@
         </p:nvSpPr>
         <p:spPr>
           <a:xfrm>
-            <a:off x="9707728" y="2766060"/>
+            <a:off x="9707728" y="2674620"/>
             <a:ext cx="1463040" cy="1463040"/>
           </a:xfrm>
           <a:prstGeom prst="ellipse">
@@ -4834,7 +4588,7 @@
         </p:blipFill>
         <p:spPr>
           <a:xfrm>
-            <a:off x="10073488" y="3131820"/>
+            <a:off x="10073488" y="3040380"/>
             <a:ext cx="731520" cy="731520"/>
           </a:xfrm>
           <a:prstGeom prst="rect">
@@ -4850,8 +4604,8 @@
         </p:nvSpPr>
         <p:spPr>
           <a:xfrm>
-            <a:off x="457200" y="5852160"/>
-            <a:ext cx="11277295" cy="274320"/>
+            <a:off x="457200" y="5669280"/>
+            <a:ext cx="11277295" cy="457200"/>
           </a:xfrm>
           <a:prstGeom prst="rect">
             <a:avLst/>
@@ -4872,7 +4626,7 @@
                   <a:schemeClr val="accent5"/>
                 </a:solidFill>
               </a:rPr>
-              <a:t>Nothing new if stage 1 was run. Section 1b of the procedure; each item is listed with its specification and drawing so it can be made for this procedure alone.</a:t>
+              <a:t>Nothing new if stage 1 was run. Section 1b of the procedure; the rigid sensor mount is in hand from the existing drawing (1a). Each item carries its specification and drawing so it can be made for this procedure alone.</a:t>
             </a:r>
             <a:endParaRPr lang="en-US" sz="1200" dirty="0"/>
           </a:p>
@@ -9611,7 +9365,7 @@
                             <a:schemeClr val="tx1"/>
                           </a:solidFill>
                         </a:rPr>
-                        <a:t>Mitutoyo or Starrett; DIN 874 grade 0 straightedge</a:t>
+                        <a:t>Mitutoyo or Starrett; DIN 874 grade 0 or better straightedge</a:t>
                       </a:r>
                       <a:endParaRPr lang="en-US" sz="1400" dirty="0"/>
                     </a:p>
@@ -10152,11 +9906,11 @@
         <p:spPr>
           <a:xfrm>
             <a:off x="5303520" y="1417320"/>
-            <a:ext cx="6430975" cy="1040130"/>
+            <a:ext cx="6430975" cy="984209"/>
           </a:xfrm>
           <a:prstGeom prst="roundRect">
             <a:avLst>
-              <a:gd name="adj" fmla="val 10549"/>
+              <a:gd name="adj" fmla="val 11149"/>
             </a:avLst>
           </a:prstGeom>
           <a:solidFill>
@@ -10173,7 +9927,7 @@
         </p:nvSpPr>
         <p:spPr>
           <a:xfrm>
-            <a:off x="5532120" y="1617345"/>
+            <a:off x="5532120" y="1589385"/>
             <a:ext cx="640080" cy="640080"/>
           </a:xfrm>
           <a:prstGeom prst="ellipse">
@@ -10201,7 +9955,7 @@
         </p:blipFill>
         <p:spPr>
           <a:xfrm>
-            <a:off x="5692140" y="1777365"/>
+            <a:off x="5692140" y="1749405"/>
             <a:ext cx="320040" cy="320040"/>
           </a:xfrm>
           <a:prstGeom prst="rect">
@@ -10218,7 +9972,7 @@
         <p:spPr>
           <a:xfrm>
             <a:off x="6355080" y="1508760"/>
-            <a:ext cx="5150815" cy="857250"/>
+            <a:ext cx="5150815" cy="801329"/>
           </a:xfrm>
           <a:prstGeom prst="rect">
             <a:avLst/>
@@ -10267,12 +10021,12 @@
         </p:nvSpPr>
         <p:spPr>
           <a:xfrm>
-            <a:off x="5303520" y="2640330"/>
-            <a:ext cx="6430975" cy="1040130"/>
+            <a:off x="5303520" y="2584409"/>
+            <a:ext cx="6430975" cy="984209"/>
           </a:xfrm>
           <a:prstGeom prst="roundRect">
             <a:avLst>
-              <a:gd name="adj" fmla="val 10549"/>
+              <a:gd name="adj" fmla="val 11149"/>
             </a:avLst>
           </a:prstGeom>
           <a:solidFill>
@@ -10289,7 +10043,7 @@
         </p:nvSpPr>
         <p:spPr>
           <a:xfrm>
-            <a:off x="5532120" y="2840355"/>
+            <a:off x="5532120" y="2756474"/>
             <a:ext cx="640080" cy="640080"/>
           </a:xfrm>
           <a:prstGeom prst="ellipse">
@@ -10317,7 +10071,7 @@
         </p:blipFill>
         <p:spPr>
           <a:xfrm>
-            <a:off x="5692140" y="3000375"/>
+            <a:off x="5692140" y="2916494"/>
             <a:ext cx="320040" cy="320040"/>
           </a:xfrm>
           <a:prstGeom prst="rect">
@@ -10333,8 +10087,8 @@
         </p:nvSpPr>
         <p:spPr>
           <a:xfrm>
-            <a:off x="6355080" y="2731770"/>
-            <a:ext cx="5150815" cy="857250"/>
+            <a:off x="6355080" y="2675849"/>
+            <a:ext cx="5150815" cy="801329"/>
           </a:xfrm>
           <a:prstGeom prst="rect">
             <a:avLst/>
@@ -10383,12 +10137,12 @@
         </p:nvSpPr>
         <p:spPr>
           <a:xfrm>
-            <a:off x="5303520" y="3863340"/>
-            <a:ext cx="6430975" cy="1040130"/>
+            <a:off x="5303520" y="3751498"/>
+            <a:ext cx="6430975" cy="1207893"/>
           </a:xfrm>
           <a:prstGeom prst="roundRect">
             <a:avLst>
-              <a:gd name="adj" fmla="val 10549"/>
+              <a:gd name="adj" fmla="val 9084"/>
             </a:avLst>
           </a:prstGeom>
           <a:solidFill>
@@ -10405,7 +10159,7 @@
         </p:nvSpPr>
         <p:spPr>
           <a:xfrm>
-            <a:off x="5532120" y="4063365"/>
+            <a:off x="5532120" y="4035405"/>
             <a:ext cx="640080" cy="640080"/>
           </a:xfrm>
           <a:prstGeom prst="ellipse">
@@ -10433,7 +10187,7 @@
         </p:blipFill>
         <p:spPr>
           <a:xfrm>
-            <a:off x="5692140" y="4223385"/>
+            <a:off x="5692140" y="4195425"/>
             <a:ext cx="320040" cy="320040"/>
           </a:xfrm>
           <a:prstGeom prst="rect">
@@ -10449,8 +10203,8 @@
         </p:nvSpPr>
         <p:spPr>
           <a:xfrm>
-            <a:off x="6355080" y="3954780"/>
-            <a:ext cx="5150815" cy="857250"/>
+            <a:off x="6355080" y="3842938"/>
+            <a:ext cx="5150815" cy="1025013"/>
           </a:xfrm>
           <a:prstGeom prst="rect">
             <a:avLst/>
@@ -10485,7 +10239,7 @@
                   <a:schemeClr val="tx1"/>
                 </a:solidFill>
               </a:rPr>
-              <a:t>About 150 x 100 x 12 mm, bolted to the cell table with two M8 screws, so the base holds on any table and does not creep</a:t>
+              <a:t>About 150 x 100 x 12 mm, bolted to the cell table with two M8 screws, so the base holds on a non-magnetic table and does not creep</a:t>
             </a:r>
             <a:endParaRPr lang="en-US" sz="1600" dirty="0"/>
           </a:p>
@@ -10499,12 +10253,12 @@
         </p:nvSpPr>
         <p:spPr>
           <a:xfrm>
-            <a:off x="5303520" y="5086350"/>
-            <a:ext cx="6430975" cy="1040130"/>
+            <a:off x="5303520" y="5142271"/>
+            <a:ext cx="6430975" cy="984209"/>
           </a:xfrm>
           <a:prstGeom prst="roundRect">
             <a:avLst>
-              <a:gd name="adj" fmla="val 10549"/>
+              <a:gd name="adj" fmla="val 11149"/>
             </a:avLst>
           </a:prstGeom>
           <a:solidFill>
@@ -10521,7 +10275,7 @@
         </p:nvSpPr>
         <p:spPr>
           <a:xfrm>
-            <a:off x="5532120" y="5286375"/>
+            <a:off x="5532120" y="5314335"/>
             <a:ext cx="640080" cy="640080"/>
           </a:xfrm>
           <a:prstGeom prst="ellipse">
@@ -10549,7 +10303,7 @@
         </p:blipFill>
         <p:spPr>
           <a:xfrm>
-            <a:off x="5692140" y="5446395"/>
+            <a:off x="5692140" y="5474355"/>
             <a:ext cx="320040" cy="320040"/>
           </a:xfrm>
           <a:prstGeom prst="rect">
@@ -10565,8 +10319,8 @@
         </p:nvSpPr>
         <p:spPr>
           <a:xfrm>
-            <a:off x="6355080" y="5177790"/>
-            <a:ext cx="5150815" cy="857250"/>
+            <a:off x="6355080" y="5233711"/>
+            <a:ext cx="5150815" cy="801329"/>
           </a:xfrm>
           <a:prstGeom prst="rect">
             <a:avLst/>
